--- a/public/ppt-beautify/covers/red-corporate.pptx
+++ b/public/ppt-beautify/covers/red-corporate.pptx
@@ -883,18 +883,23 @@
         </p:nvSpPr>
         <p:spPr>
           <a:xfrm>
-            <a:off x="0" y="4663440"/>
-            <a:ext cx="9144000" cy="502920"/>
+            <a:off x="5943600" y="-457200"/>
+            <a:ext cx="3840480" cy="3474720"/>
           </a:xfrm>
-          <a:prstGeom prst="rect">
+          <a:prstGeom prst="ellipse">
             <a:avLst/>
           </a:prstGeom>
           <a:solidFill>
             <a:srgbClr val="FDE68A">
-              <a:alpha val="65000"/>
+              <a:alpha val="18000"/>
             </a:srgbClr>
           </a:solidFill>
-          <a:ln/>
+          <a:ln w="12700">
+            <a:solidFill>
+              <a:srgbClr val="333333"/>
+            </a:solidFill>
+            <a:prstDash val="solid"/>
+          </a:ln>
         </p:spPr>
       </p:sp>
       <p:sp>
@@ -905,16 +910,23 @@
         </p:nvSpPr>
         <p:spPr>
           <a:xfrm>
-            <a:off x="0" y="0"/>
-            <a:ext cx="109728" cy="5143500"/>
+            <a:off x="-914400" y="3657600"/>
+            <a:ext cx="3200400" cy="2743200"/>
           </a:xfrm>
-          <a:prstGeom prst="rect">
+          <a:prstGeom prst="ellipse">
             <a:avLst/>
           </a:prstGeom>
           <a:solidFill>
-            <a:srgbClr val="FDE68A"/>
-          </a:solidFill>
-          <a:ln/>
+            <a:srgbClr val="991B1B">
+              <a:alpha val="12000"/>
+            </a:srgbClr>
+          </a:solidFill>
+          <a:ln w="12700">
+            <a:solidFill>
+              <a:srgbClr val="333333"/>
+            </a:solidFill>
+            <a:prstDash val="solid"/>
+          </a:ln>
         </p:spPr>
       </p:sp>
       <p:sp>
@@ -925,8 +937,8 @@
         </p:nvSpPr>
         <p:spPr>
           <a:xfrm>
-            <a:off x="502920" y="1508760"/>
-            <a:ext cx="8046720" cy="1097280"/>
+            <a:off x="731520" y="1691640"/>
+            <a:ext cx="7680960" cy="1097280"/>
           </a:xfrm>
           <a:prstGeom prst="rect">
             <a:avLst/>
@@ -938,11 +950,11 @@
           <a:bodyPr wrap="square" rtlCol="0" anchor="ctr"/>
           <a:lstStyle/>
           <a:p>
-            <a:pPr indent="0" marL="0">
+            <a:pPr algn="ctr" indent="0" marL="0">
               <a:buNone/>
             </a:pPr>
             <a:r>
-              <a:rPr lang="en-US" sz="3200" b="1" dirty="0">
+              <a:rPr lang="en-US" sz="3600" b="1" dirty="0">
                 <a:solidFill>
                   <a:srgbClr val="FFFFFF"/>
                 </a:solidFill>
@@ -950,9 +962,9 @@
                 <a:ea typeface="Microsoft YaHei" pitchFamily="34" charset="-122"/>
                 <a:cs typeface="Microsoft YaHei" pitchFamily="34" charset="-120"/>
               </a:rPr>
-              <a:t>在此填写主标题</a:t>
+              <a:t>CC_COVER_TITLE</a:t>
             </a:r>
-            <a:endParaRPr lang="en-US" sz="3200" dirty="0"/>
+            <a:endParaRPr lang="en-US" sz="3600" dirty="0"/>
           </a:p>
         </p:txBody>
       </p:sp>
@@ -964,8 +976,8 @@
         </p:nvSpPr>
         <p:spPr>
           <a:xfrm>
-            <a:off x="502920" y="2697480"/>
-            <a:ext cx="8046720" cy="685800"/>
+            <a:off x="731520" y="2788920"/>
+            <a:ext cx="7680960" cy="685800"/>
           </a:xfrm>
           <a:prstGeom prst="rect">
             <a:avLst/>
@@ -977,7 +989,7 @@
           <a:bodyPr wrap="square" rtlCol="0" anchor="ctr"/>
           <a:lstStyle/>
           <a:p>
-            <a:pPr indent="0" marL="0">
+            <a:pPr algn="ctr" indent="0" marL="0">
               <a:buNone/>
             </a:pPr>
             <a:r>
@@ -989,7 +1001,7 @@
                 <a:ea typeface="Microsoft YaHei" pitchFamily="34" charset="-122"/>
                 <a:cs typeface="Microsoft YaHei" pitchFamily="34" charset="-120"/>
               </a:rPr>
-              <a:t>在此填写副标题</a:t>
+              <a:t>CC_COVER_SUBTITLE</a:t>
             </a:r>
             <a:endParaRPr lang="en-US" sz="1600" dirty="0"/>
           </a:p>
@@ -1028,7 +1040,7 @@
                 <a:ea typeface="Microsoft YaHei" pitchFamily="34" charset="-122"/>
                 <a:cs typeface="Microsoft YaHei" pitchFamily="34" charset="-120"/>
               </a:rPr>
-              <a:t>汇报人</a:t>
+              <a:t>CC_COVER_AUTHOR</a:t>
             </a:r>
             <a:endParaRPr lang="en-US" sz="1200" dirty="0"/>
           </a:p>
@@ -1067,7 +1079,7 @@
                 <a:ea typeface="Microsoft YaHei" pitchFamily="34" charset="-122"/>
                 <a:cs typeface="Microsoft YaHei" pitchFamily="34" charset="-120"/>
               </a:rPr>
-              <a:t>2025.01.01</a:t>
+              <a:t>CC_COVER_DATE</a:t>
             </a:r>
             <a:endParaRPr lang="en-US" sz="1200" dirty="0"/>
           </a:p>
